--- a/codes/data/2025/May_12/arranging_datas_with_init_time/statistics_with_powers.pptx
+++ b/codes/data/2025/May_12/arranging_datas_with_init_time/statistics_with_powers.pptx
@@ -7,6 +7,10 @@
   <p:sldIdLst>
     <p:sldId id="256" r:id="rId2"/>
     <p:sldId id="257" r:id="rId3"/>
+    <p:sldId id="258" r:id="rId4"/>
+    <p:sldId id="259" r:id="rId5"/>
+    <p:sldId id="260" r:id="rId6"/>
+    <p:sldId id="261" r:id="rId7"/>
   </p:sldIdLst>
   <p:sldSz cx="12192000" cy="6858000"/>
   <p:notesSz cx="6858000" cy="9144000"/>
@@ -105,7 +109,62 @@
       </a:defRPr>
     </a:lvl9pPr>
   </p:defaultTextStyle>
+  <p:extLst>
+    <p:ext uri="{EFAFB233-063F-42B5-8137-9DF3F51BA10A}">
+      <p15:sldGuideLst xmlns:p15="http://schemas.microsoft.com/office/powerpoint/2012/main"/>
+    </p:ext>
+  </p:extLst>
 </p:presentation>
+</file>
+
+<file path=ppt/revisionInfo.xml><?xml version="1.0" encoding="utf-8"?>
+<p1510:revInfo xmlns:a="http://schemas.openxmlformats.org/drawingml/2006/main" xmlns:r="http://schemas.openxmlformats.org/officeDocument/2006/relationships" xmlns:p1510="http://schemas.microsoft.com/office/powerpoint/2015/10/main">
+  <p1510:revLst>
+    <p1510:client id="{EC76BB38-1443-4CA2-B855-82742440F56E}" v="1" dt="2025-07-28T06:08:33.864"/>
+  </p1510:revLst>
+</p1510:revInfo>
+</file>
+
+<file path=ppt/changesInfos/changesInfo1.xml><?xml version="1.0" encoding="utf-8"?>
+<pc:chgInfo xmlns:a="http://schemas.openxmlformats.org/drawingml/2006/main" xmlns:r="http://schemas.openxmlformats.org/officeDocument/2006/relationships" xmlns:ac="http://schemas.microsoft.com/office/drawing/2013/main/command" xmlns:pc="http://schemas.microsoft.com/office/powerpoint/2013/main/command">
+  <pc:docChgLst>
+    <pc:chgData name="Qspin Lab" userId="97667f051c2df3a9" providerId="LiveId" clId="{EC76BB38-1443-4CA2-B855-82742440F56E}"/>
+    <pc:docChg chg="addSld modSld">
+      <pc:chgData name="Qspin Lab" userId="97667f051c2df3a9" providerId="LiveId" clId="{EC76BB38-1443-4CA2-B855-82742440F56E}" dt="2025-07-28T06:08:33.848" v="0"/>
+      <pc:docMkLst>
+        <pc:docMk/>
+      </pc:docMkLst>
+      <pc:sldChg chg="add">
+        <pc:chgData name="Qspin Lab" userId="97667f051c2df3a9" providerId="LiveId" clId="{EC76BB38-1443-4CA2-B855-82742440F56E}" dt="2025-07-28T06:08:33.848" v="0"/>
+        <pc:sldMkLst>
+          <pc:docMk/>
+          <pc:sldMk cId="3113036647" sldId="258"/>
+        </pc:sldMkLst>
+      </pc:sldChg>
+      <pc:sldChg chg="add">
+        <pc:chgData name="Qspin Lab" userId="97667f051c2df3a9" providerId="LiveId" clId="{EC76BB38-1443-4CA2-B855-82742440F56E}" dt="2025-07-28T06:08:33.848" v="0"/>
+        <pc:sldMkLst>
+          <pc:docMk/>
+          <pc:sldMk cId="1380856741" sldId="259"/>
+        </pc:sldMkLst>
+      </pc:sldChg>
+      <pc:sldChg chg="add">
+        <pc:chgData name="Qspin Lab" userId="97667f051c2df3a9" providerId="LiveId" clId="{EC76BB38-1443-4CA2-B855-82742440F56E}" dt="2025-07-28T06:08:33.848" v="0"/>
+        <pc:sldMkLst>
+          <pc:docMk/>
+          <pc:sldMk cId="3704894574" sldId="260"/>
+        </pc:sldMkLst>
+      </pc:sldChg>
+      <pc:sldChg chg="add">
+        <pc:chgData name="Qspin Lab" userId="97667f051c2df3a9" providerId="LiveId" clId="{EC76BB38-1443-4CA2-B855-82742440F56E}" dt="2025-07-28T06:08:33.848" v="0"/>
+        <pc:sldMkLst>
+          <pc:docMk/>
+          <pc:sldMk cId="925765398" sldId="261"/>
+        </pc:sldMkLst>
+      </pc:sldChg>
+    </pc:docChg>
+  </pc:docChgLst>
+</pc:chgInfo>
 </file>
 
 <file path=ppt/slideLayouts/slideLayout1.xml><?xml version="1.0" encoding="utf-8"?>
@@ -257,7 +316,7 @@
           <a:p>
             <a:fld id="{F2893589-6773-40FD-BFE1-FA9DA81A7689}" type="datetimeFigureOut">
               <a:rPr lang="en-IN" smtClean="0"/>
-              <a:t>26-07-2025</a:t>
+              <a:t>28-07-2025</a:t>
             </a:fld>
             <a:endParaRPr lang="en-IN"/>
           </a:p>
@@ -457,7 +516,7 @@
           <a:p>
             <a:fld id="{F2893589-6773-40FD-BFE1-FA9DA81A7689}" type="datetimeFigureOut">
               <a:rPr lang="en-IN" smtClean="0"/>
-              <a:t>26-07-2025</a:t>
+              <a:t>28-07-2025</a:t>
             </a:fld>
             <a:endParaRPr lang="en-IN"/>
           </a:p>
@@ -667,7 +726,7 @@
           <a:p>
             <a:fld id="{F2893589-6773-40FD-BFE1-FA9DA81A7689}" type="datetimeFigureOut">
               <a:rPr lang="en-IN" smtClean="0"/>
-              <a:t>26-07-2025</a:t>
+              <a:t>28-07-2025</a:t>
             </a:fld>
             <a:endParaRPr lang="en-IN"/>
           </a:p>
@@ -867,7 +926,7 @@
           <a:p>
             <a:fld id="{F2893589-6773-40FD-BFE1-FA9DA81A7689}" type="datetimeFigureOut">
               <a:rPr lang="en-IN" smtClean="0"/>
-              <a:t>26-07-2025</a:t>
+              <a:t>28-07-2025</a:t>
             </a:fld>
             <a:endParaRPr lang="en-IN"/>
           </a:p>
@@ -1143,7 +1202,7 @@
           <a:p>
             <a:fld id="{F2893589-6773-40FD-BFE1-FA9DA81A7689}" type="datetimeFigureOut">
               <a:rPr lang="en-IN" smtClean="0"/>
-              <a:t>26-07-2025</a:t>
+              <a:t>28-07-2025</a:t>
             </a:fld>
             <a:endParaRPr lang="en-IN"/>
           </a:p>
@@ -1411,7 +1470,7 @@
           <a:p>
             <a:fld id="{F2893589-6773-40FD-BFE1-FA9DA81A7689}" type="datetimeFigureOut">
               <a:rPr lang="en-IN" smtClean="0"/>
-              <a:t>26-07-2025</a:t>
+              <a:t>28-07-2025</a:t>
             </a:fld>
             <a:endParaRPr lang="en-IN"/>
           </a:p>
@@ -1826,7 +1885,7 @@
           <a:p>
             <a:fld id="{F2893589-6773-40FD-BFE1-FA9DA81A7689}" type="datetimeFigureOut">
               <a:rPr lang="en-IN" smtClean="0"/>
-              <a:t>26-07-2025</a:t>
+              <a:t>28-07-2025</a:t>
             </a:fld>
             <a:endParaRPr lang="en-IN"/>
           </a:p>
@@ -1968,7 +2027,7 @@
           <a:p>
             <a:fld id="{F2893589-6773-40FD-BFE1-FA9DA81A7689}" type="datetimeFigureOut">
               <a:rPr lang="en-IN" smtClean="0"/>
-              <a:t>26-07-2025</a:t>
+              <a:t>28-07-2025</a:t>
             </a:fld>
             <a:endParaRPr lang="en-IN"/>
           </a:p>
@@ -2081,7 +2140,7 @@
           <a:p>
             <a:fld id="{F2893589-6773-40FD-BFE1-FA9DA81A7689}" type="datetimeFigureOut">
               <a:rPr lang="en-IN" smtClean="0"/>
-              <a:t>26-07-2025</a:t>
+              <a:t>28-07-2025</a:t>
             </a:fld>
             <a:endParaRPr lang="en-IN"/>
           </a:p>
@@ -2394,7 +2453,7 @@
           <a:p>
             <a:fld id="{F2893589-6773-40FD-BFE1-FA9DA81A7689}" type="datetimeFigureOut">
               <a:rPr lang="en-IN" smtClean="0"/>
-              <a:t>26-07-2025</a:t>
+              <a:t>28-07-2025</a:t>
             </a:fld>
             <a:endParaRPr lang="en-IN"/>
           </a:p>
@@ -2683,7 +2742,7 @@
           <a:p>
             <a:fld id="{F2893589-6773-40FD-BFE1-FA9DA81A7689}" type="datetimeFigureOut">
               <a:rPr lang="en-IN" smtClean="0"/>
-              <a:t>26-07-2025</a:t>
+              <a:t>28-07-2025</a:t>
             </a:fld>
             <a:endParaRPr lang="en-IN"/>
           </a:p>
@@ -2926,7 +2985,7 @@
           <a:p>
             <a:fld id="{F2893589-6773-40FD-BFE1-FA9DA81A7689}" type="datetimeFigureOut">
               <a:rPr lang="en-IN" smtClean="0"/>
-              <a:t>26-07-2025</a:t>
+              <a:t>28-07-2025</a:t>
             </a:fld>
             <a:endParaRPr lang="en-IN"/>
           </a:p>
@@ -3674,6 +3733,858 @@
 </p:sld>
 </file>
 
+<file path=ppt/slides/slide3.xml><?xml version="1.0" encoding="utf-8"?>
+<p:sld xmlns:a="http://schemas.openxmlformats.org/drawingml/2006/main" xmlns:r="http://schemas.openxmlformats.org/officeDocument/2006/relationships" xmlns:p="http://schemas.openxmlformats.org/presentationml/2006/main">
+  <p:cSld>
+    <p:spTree>
+      <p:nvGrpSpPr>
+        <p:cNvPr id="1" name=""/>
+        <p:cNvGrpSpPr/>
+        <p:nvPr/>
+      </p:nvGrpSpPr>
+      <p:grpSpPr>
+        <a:xfrm>
+          <a:off x="0" y="0"/>
+          <a:ext cx="0" cy="0"/>
+          <a:chOff x="0" y="0"/>
+          <a:chExt cx="0" cy="0"/>
+        </a:xfrm>
+      </p:grpSpPr>
+      <p:pic>
+        <p:nvPicPr>
+          <p:cNvPr id="5" name="Picture 4" descr="A graph of a function&#10;&#10;AI-generated content may be incorrect.">
+            <a:extLst>
+              <a:ext uri="{FF2B5EF4-FFF2-40B4-BE49-F238E27FC236}">
+                <a16:creationId xmlns:a16="http://schemas.microsoft.com/office/drawing/2014/main" id="{9E1C1494-F105-B55C-74A5-5152193542E0}"/>
+              </a:ext>
+            </a:extLst>
+          </p:cNvPr>
+          <p:cNvPicPr>
+            <a:picLocks noChangeAspect="1"/>
+          </p:cNvPicPr>
+          <p:nvPr/>
+        </p:nvPicPr>
+        <p:blipFill>
+          <a:blip r:embed="rId2">
+            <a:extLst>
+              <a:ext uri="{28A0092B-C50C-407E-A947-70E740481C1C}">
+                <a14:useLocalDpi xmlns:a14="http://schemas.microsoft.com/office/drawing/2010/main" val="0"/>
+              </a:ext>
+            </a:extLst>
+          </a:blip>
+          <a:stretch>
+            <a:fillRect/>
+          </a:stretch>
+        </p:blipFill>
+        <p:spPr>
+          <a:xfrm>
+            <a:off x="193220" y="0"/>
+            <a:ext cx="4594591" cy="3445943"/>
+          </a:xfrm>
+          <a:prstGeom prst="rect">
+            <a:avLst/>
+          </a:prstGeom>
+        </p:spPr>
+      </p:pic>
+      <p:pic>
+        <p:nvPicPr>
+          <p:cNvPr id="7" name="Picture 6" descr="A graph of a signal&#10;&#10;AI-generated content may be incorrect.">
+            <a:extLst>
+              <a:ext uri="{FF2B5EF4-FFF2-40B4-BE49-F238E27FC236}">
+                <a16:creationId xmlns:a16="http://schemas.microsoft.com/office/drawing/2014/main" id="{4E78CB47-BCC7-89CD-AEBB-618B7AF7C95B}"/>
+              </a:ext>
+            </a:extLst>
+          </p:cNvPr>
+          <p:cNvPicPr>
+            <a:picLocks noChangeAspect="1"/>
+          </p:cNvPicPr>
+          <p:nvPr/>
+        </p:nvPicPr>
+        <p:blipFill>
+          <a:blip r:embed="rId3">
+            <a:extLst>
+              <a:ext uri="{28A0092B-C50C-407E-A947-70E740481C1C}">
+                <a14:useLocalDpi xmlns:a14="http://schemas.microsoft.com/office/drawing/2010/main" val="0"/>
+              </a:ext>
+            </a:extLst>
+          </a:blip>
+          <a:stretch>
+            <a:fillRect/>
+          </a:stretch>
+        </p:blipFill>
+        <p:spPr>
+          <a:xfrm>
+            <a:off x="193220" y="3445943"/>
+            <a:ext cx="4449264" cy="3336948"/>
+          </a:xfrm>
+          <a:prstGeom prst="rect">
+            <a:avLst/>
+          </a:prstGeom>
+        </p:spPr>
+      </p:pic>
+      <p:pic>
+        <p:nvPicPr>
+          <p:cNvPr id="3" name="Picture 2" descr="A graph with different colored lines&#10;&#10;AI-generated content may be incorrect.">
+            <a:extLst>
+              <a:ext uri="{FF2B5EF4-FFF2-40B4-BE49-F238E27FC236}">
+                <a16:creationId xmlns:a16="http://schemas.microsoft.com/office/drawing/2014/main" id="{9FBC8305-A12B-7137-6C1A-F12B6297FDB0}"/>
+              </a:ext>
+            </a:extLst>
+          </p:cNvPr>
+          <p:cNvPicPr>
+            <a:picLocks noChangeAspect="1"/>
+          </p:cNvPicPr>
+          <p:nvPr/>
+        </p:nvPicPr>
+        <p:blipFill>
+          <a:blip r:embed="rId4">
+            <a:extLst>
+              <a:ext uri="{28A0092B-C50C-407E-A947-70E740481C1C}">
+                <a14:useLocalDpi xmlns:a14="http://schemas.microsoft.com/office/drawing/2010/main" val="0"/>
+              </a:ext>
+            </a:extLst>
+          </a:blip>
+          <a:stretch>
+            <a:fillRect/>
+          </a:stretch>
+        </p:blipFill>
+        <p:spPr>
+          <a:xfrm>
+            <a:off x="4787811" y="189446"/>
+            <a:ext cx="3506405" cy="3068104"/>
+          </a:xfrm>
+          <a:prstGeom prst="rect">
+            <a:avLst/>
+          </a:prstGeom>
+        </p:spPr>
+      </p:pic>
+      <p:pic>
+        <p:nvPicPr>
+          <p:cNvPr id="6" name="Picture 5" descr="A graph of different colored lines&#10;&#10;AI-generated content may be incorrect.">
+            <a:extLst>
+              <a:ext uri="{FF2B5EF4-FFF2-40B4-BE49-F238E27FC236}">
+                <a16:creationId xmlns:a16="http://schemas.microsoft.com/office/drawing/2014/main" id="{77A21F56-55AD-206D-27E2-9B450D0A8C90}"/>
+              </a:ext>
+            </a:extLst>
+          </p:cNvPr>
+          <p:cNvPicPr>
+            <a:picLocks noChangeAspect="1"/>
+          </p:cNvPicPr>
+          <p:nvPr/>
+        </p:nvPicPr>
+        <p:blipFill>
+          <a:blip r:embed="rId5">
+            <a:extLst>
+              <a:ext uri="{28A0092B-C50C-407E-A947-70E740481C1C}">
+                <a14:useLocalDpi xmlns:a14="http://schemas.microsoft.com/office/drawing/2010/main" val="0"/>
+              </a:ext>
+            </a:extLst>
+          </a:blip>
+          <a:stretch>
+            <a:fillRect/>
+          </a:stretch>
+        </p:blipFill>
+        <p:spPr>
+          <a:xfrm>
+            <a:off x="4669351" y="3257550"/>
+            <a:ext cx="3624943" cy="3171825"/>
+          </a:xfrm>
+          <a:prstGeom prst="rect">
+            <a:avLst/>
+          </a:prstGeom>
+        </p:spPr>
+      </p:pic>
+      <p:pic>
+        <p:nvPicPr>
+          <p:cNvPr id="8" name="Picture 7" descr="A graph of numbers and lines&#10;&#10;AI-generated content may be incorrect.">
+            <a:extLst>
+              <a:ext uri="{FF2B5EF4-FFF2-40B4-BE49-F238E27FC236}">
+                <a16:creationId xmlns:a16="http://schemas.microsoft.com/office/drawing/2014/main" id="{59DE882A-9E3A-8D0D-572F-A88E9CB61967}"/>
+              </a:ext>
+            </a:extLst>
+          </p:cNvPr>
+          <p:cNvPicPr>
+            <a:picLocks noChangeAspect="1"/>
+          </p:cNvPicPr>
+          <p:nvPr/>
+        </p:nvPicPr>
+        <p:blipFill>
+          <a:blip r:embed="rId6">
+            <a:extLst>
+              <a:ext uri="{28A0092B-C50C-407E-A947-70E740481C1C}">
+                <a14:useLocalDpi xmlns:a14="http://schemas.microsoft.com/office/drawing/2010/main" val="0"/>
+              </a:ext>
+            </a:extLst>
+          </a:blip>
+          <a:stretch>
+            <a:fillRect/>
+          </a:stretch>
+        </p:blipFill>
+        <p:spPr>
+          <a:xfrm>
+            <a:off x="8492375" y="1775358"/>
+            <a:ext cx="3506405" cy="3068104"/>
+          </a:xfrm>
+          <a:prstGeom prst="rect">
+            <a:avLst/>
+          </a:prstGeom>
+        </p:spPr>
+      </p:pic>
+    </p:spTree>
+    <p:extLst>
+      <p:ext uri="{BB962C8B-B14F-4D97-AF65-F5344CB8AC3E}">
+        <p14:creationId xmlns:p14="http://schemas.microsoft.com/office/powerpoint/2010/main" val="3113036647"/>
+      </p:ext>
+    </p:extLst>
+  </p:cSld>
+  <p:clrMapOvr>
+    <a:masterClrMapping/>
+  </p:clrMapOvr>
+</p:sld>
+</file>
+
+<file path=ppt/slides/slide4.xml><?xml version="1.0" encoding="utf-8"?>
+<p:sld xmlns:a="http://schemas.openxmlformats.org/drawingml/2006/main" xmlns:r="http://schemas.openxmlformats.org/officeDocument/2006/relationships" xmlns:p="http://schemas.openxmlformats.org/presentationml/2006/main">
+  <p:cSld>
+    <p:spTree>
+      <p:nvGrpSpPr>
+        <p:cNvPr id="1" name=""/>
+        <p:cNvGrpSpPr/>
+        <p:nvPr/>
+      </p:nvGrpSpPr>
+      <p:grpSpPr>
+        <a:xfrm>
+          <a:off x="0" y="0"/>
+          <a:ext cx="0" cy="0"/>
+          <a:chOff x="0" y="0"/>
+          <a:chExt cx="0" cy="0"/>
+        </a:xfrm>
+      </p:grpSpPr>
+      <p:pic>
+        <p:nvPicPr>
+          <p:cNvPr id="2" name="Picture 1" descr="A graph of a signal&#10;&#10;AI-generated content may be incorrect.">
+            <a:extLst>
+              <a:ext uri="{FF2B5EF4-FFF2-40B4-BE49-F238E27FC236}">
+                <a16:creationId xmlns:a16="http://schemas.microsoft.com/office/drawing/2014/main" id="{D2DCABF2-7F64-7A9D-3A0D-247A19464B21}"/>
+              </a:ext>
+            </a:extLst>
+          </p:cNvPr>
+          <p:cNvPicPr>
+            <a:picLocks noChangeAspect="1"/>
+          </p:cNvPicPr>
+          <p:nvPr/>
+        </p:nvPicPr>
+        <p:blipFill>
+          <a:blip r:embed="rId2">
+            <a:extLst>
+              <a:ext uri="{28A0092B-C50C-407E-A947-70E740481C1C}">
+                <a14:useLocalDpi xmlns:a14="http://schemas.microsoft.com/office/drawing/2010/main" val="0"/>
+              </a:ext>
+            </a:extLst>
+          </a:blip>
+          <a:stretch>
+            <a:fillRect/>
+          </a:stretch>
+        </p:blipFill>
+        <p:spPr>
+          <a:xfrm>
+            <a:off x="215298" y="179885"/>
+            <a:ext cx="4471853" cy="3353890"/>
+          </a:xfrm>
+          <a:prstGeom prst="rect">
+            <a:avLst/>
+          </a:prstGeom>
+        </p:spPr>
+      </p:pic>
+      <p:pic>
+        <p:nvPicPr>
+          <p:cNvPr id="11" name="Picture 10" descr="A graph of a signal&#10;&#10;AI-generated content may be incorrect.">
+            <a:extLst>
+              <a:ext uri="{FF2B5EF4-FFF2-40B4-BE49-F238E27FC236}">
+                <a16:creationId xmlns:a16="http://schemas.microsoft.com/office/drawing/2014/main" id="{A92A06A4-A0C0-2DF9-6F1C-3A09347E1BC9}"/>
+              </a:ext>
+            </a:extLst>
+          </p:cNvPr>
+          <p:cNvPicPr>
+            <a:picLocks noChangeAspect="1"/>
+          </p:cNvPicPr>
+          <p:nvPr/>
+        </p:nvPicPr>
+        <p:blipFill>
+          <a:blip r:embed="rId3">
+            <a:extLst>
+              <a:ext uri="{28A0092B-C50C-407E-A947-70E740481C1C}">
+                <a14:useLocalDpi xmlns:a14="http://schemas.microsoft.com/office/drawing/2010/main" val="0"/>
+              </a:ext>
+            </a:extLst>
+          </a:blip>
+          <a:stretch>
+            <a:fillRect/>
+          </a:stretch>
+        </p:blipFill>
+        <p:spPr>
+          <a:xfrm>
+            <a:off x="215298" y="3533775"/>
+            <a:ext cx="4219304" cy="3164478"/>
+          </a:xfrm>
+          <a:prstGeom prst="rect">
+            <a:avLst/>
+          </a:prstGeom>
+        </p:spPr>
+      </p:pic>
+      <p:pic>
+        <p:nvPicPr>
+          <p:cNvPr id="6" name="Picture 5" descr="A graph with different colored lines&#10;&#10;AI-generated content may be incorrect.">
+            <a:extLst>
+              <a:ext uri="{FF2B5EF4-FFF2-40B4-BE49-F238E27FC236}">
+                <a16:creationId xmlns:a16="http://schemas.microsoft.com/office/drawing/2014/main" id="{DCEFD298-049F-966B-29A5-C1AD20C77968}"/>
+              </a:ext>
+            </a:extLst>
+          </p:cNvPr>
+          <p:cNvPicPr>
+            <a:picLocks noChangeAspect="1"/>
+          </p:cNvPicPr>
+          <p:nvPr/>
+        </p:nvPicPr>
+        <p:blipFill>
+          <a:blip r:embed="rId4">
+            <a:extLst>
+              <a:ext uri="{28A0092B-C50C-407E-A947-70E740481C1C}">
+                <a14:useLocalDpi xmlns:a14="http://schemas.microsoft.com/office/drawing/2010/main" val="0"/>
+              </a:ext>
+            </a:extLst>
+          </a:blip>
+          <a:stretch>
+            <a:fillRect/>
+          </a:stretch>
+        </p:blipFill>
+        <p:spPr>
+          <a:xfrm>
+            <a:off x="4610951" y="179885"/>
+            <a:ext cx="3476625" cy="3042047"/>
+          </a:xfrm>
+          <a:prstGeom prst="rect">
+            <a:avLst/>
+          </a:prstGeom>
+        </p:spPr>
+      </p:pic>
+      <p:pic>
+        <p:nvPicPr>
+          <p:cNvPr id="10" name="Picture 9" descr="A graph of different colored lines&#10;&#10;AI-generated content may be incorrect.">
+            <a:extLst>
+              <a:ext uri="{FF2B5EF4-FFF2-40B4-BE49-F238E27FC236}">
+                <a16:creationId xmlns:a16="http://schemas.microsoft.com/office/drawing/2014/main" id="{3A009B4E-7F22-E1A1-3583-37D926EB287C}"/>
+              </a:ext>
+            </a:extLst>
+          </p:cNvPr>
+          <p:cNvPicPr>
+            <a:picLocks noChangeAspect="1"/>
+          </p:cNvPicPr>
+          <p:nvPr/>
+        </p:nvPicPr>
+        <p:blipFill>
+          <a:blip r:embed="rId5">
+            <a:extLst>
+              <a:ext uri="{28A0092B-C50C-407E-A947-70E740481C1C}">
+                <a14:useLocalDpi xmlns:a14="http://schemas.microsoft.com/office/drawing/2010/main" val="0"/>
+              </a:ext>
+            </a:extLst>
+          </a:blip>
+          <a:stretch>
+            <a:fillRect/>
+          </a:stretch>
+        </p:blipFill>
+        <p:spPr>
+          <a:xfrm>
+            <a:off x="4471030" y="3305173"/>
+            <a:ext cx="3616545" cy="3164477"/>
+          </a:xfrm>
+          <a:prstGeom prst="rect">
+            <a:avLst/>
+          </a:prstGeom>
+        </p:spPr>
+      </p:pic>
+      <p:pic>
+        <p:nvPicPr>
+          <p:cNvPr id="13" name="Picture 12" descr="A graph with numbers and lines&#10;&#10;AI-generated content may be incorrect.">
+            <a:extLst>
+              <a:ext uri="{FF2B5EF4-FFF2-40B4-BE49-F238E27FC236}">
+                <a16:creationId xmlns:a16="http://schemas.microsoft.com/office/drawing/2014/main" id="{F9B004D6-3CDE-842D-3B38-E151617E38A1}"/>
+              </a:ext>
+            </a:extLst>
+          </p:cNvPr>
+          <p:cNvPicPr>
+            <a:picLocks noChangeAspect="1"/>
+          </p:cNvPicPr>
+          <p:nvPr/>
+        </p:nvPicPr>
+        <p:blipFill>
+          <a:blip r:embed="rId6">
+            <a:extLst>
+              <a:ext uri="{28A0092B-C50C-407E-A947-70E740481C1C}">
+                <a14:useLocalDpi xmlns:a14="http://schemas.microsoft.com/office/drawing/2010/main" val="0"/>
+              </a:ext>
+            </a:extLst>
+          </a:blip>
+          <a:stretch>
+            <a:fillRect/>
+          </a:stretch>
+        </p:blipFill>
+        <p:spPr>
+          <a:xfrm>
+            <a:off x="8191500" y="1409700"/>
+            <a:ext cx="3616545" cy="3164477"/>
+          </a:xfrm>
+          <a:prstGeom prst="rect">
+            <a:avLst/>
+          </a:prstGeom>
+        </p:spPr>
+      </p:pic>
+    </p:spTree>
+    <p:extLst>
+      <p:ext uri="{BB962C8B-B14F-4D97-AF65-F5344CB8AC3E}">
+        <p14:creationId xmlns:p14="http://schemas.microsoft.com/office/powerpoint/2010/main" val="1380856741"/>
+      </p:ext>
+    </p:extLst>
+  </p:cSld>
+  <p:clrMapOvr>
+    <a:masterClrMapping/>
+  </p:clrMapOvr>
+</p:sld>
+</file>
+
+<file path=ppt/slides/slide5.xml><?xml version="1.0" encoding="utf-8"?>
+<p:sld xmlns:a="http://schemas.openxmlformats.org/drawingml/2006/main" xmlns:r="http://schemas.openxmlformats.org/officeDocument/2006/relationships" xmlns:p="http://schemas.openxmlformats.org/presentationml/2006/main">
+  <p:cSld>
+    <p:spTree>
+      <p:nvGrpSpPr>
+        <p:cNvPr id="1" name="">
+          <a:extLst>
+            <a:ext uri="{FF2B5EF4-FFF2-40B4-BE49-F238E27FC236}">
+              <a16:creationId xmlns:a16="http://schemas.microsoft.com/office/drawing/2014/main" id="{353C04A1-6669-62A6-E4E8-04EC7D8EFEFE}"/>
+            </a:ext>
+          </a:extLst>
+        </p:cNvPr>
+        <p:cNvGrpSpPr/>
+        <p:nvPr/>
+      </p:nvGrpSpPr>
+      <p:grpSpPr>
+        <a:xfrm>
+          <a:off x="0" y="0"/>
+          <a:ext cx="0" cy="0"/>
+          <a:chOff x="0" y="0"/>
+          <a:chExt cx="0" cy="0"/>
+        </a:xfrm>
+      </p:grpSpPr>
+      <p:pic>
+        <p:nvPicPr>
+          <p:cNvPr id="3" name="Picture 2" descr="A graph of a signal&#10;&#10;AI-generated content may be incorrect.">
+            <a:extLst>
+              <a:ext uri="{FF2B5EF4-FFF2-40B4-BE49-F238E27FC236}">
+                <a16:creationId xmlns:a16="http://schemas.microsoft.com/office/drawing/2014/main" id="{822D8C3F-DF2A-845E-E099-E341C305B307}"/>
+              </a:ext>
+            </a:extLst>
+          </p:cNvPr>
+          <p:cNvPicPr>
+            <a:picLocks noChangeAspect="1"/>
+          </p:cNvPicPr>
+          <p:nvPr/>
+        </p:nvPicPr>
+        <p:blipFill>
+          <a:blip r:embed="rId2">
+            <a:extLst>
+              <a:ext uri="{28A0092B-C50C-407E-A947-70E740481C1C}">
+                <a14:useLocalDpi xmlns:a14="http://schemas.microsoft.com/office/drawing/2010/main" val="0"/>
+              </a:ext>
+            </a:extLst>
+          </a:blip>
+          <a:stretch>
+            <a:fillRect/>
+          </a:stretch>
+        </p:blipFill>
+        <p:spPr>
+          <a:xfrm>
+            <a:off x="231865" y="-1"/>
+            <a:ext cx="4454435" cy="3340827"/>
+          </a:xfrm>
+          <a:prstGeom prst="rect">
+            <a:avLst/>
+          </a:prstGeom>
+        </p:spPr>
+      </p:pic>
+      <p:pic>
+        <p:nvPicPr>
+          <p:cNvPr id="5" name="Picture 4" descr="A graph of a signal&#10;&#10;AI-generated content may be incorrect.">
+            <a:extLst>
+              <a:ext uri="{FF2B5EF4-FFF2-40B4-BE49-F238E27FC236}">
+                <a16:creationId xmlns:a16="http://schemas.microsoft.com/office/drawing/2014/main" id="{FA49CDD7-0D7E-9ACC-F23C-5BF88527177C}"/>
+              </a:ext>
+            </a:extLst>
+          </p:cNvPr>
+          <p:cNvPicPr>
+            <a:picLocks noChangeAspect="1"/>
+          </p:cNvPicPr>
+          <p:nvPr/>
+        </p:nvPicPr>
+        <p:blipFill>
+          <a:blip r:embed="rId3">
+            <a:extLst>
+              <a:ext uri="{28A0092B-C50C-407E-A947-70E740481C1C}">
+                <a14:useLocalDpi xmlns:a14="http://schemas.microsoft.com/office/drawing/2010/main" val="0"/>
+              </a:ext>
+            </a:extLst>
+          </a:blip>
+          <a:stretch>
+            <a:fillRect/>
+          </a:stretch>
+        </p:blipFill>
+        <p:spPr>
+          <a:xfrm>
+            <a:off x="231866" y="3429000"/>
+            <a:ext cx="4454434" cy="3340826"/>
+          </a:xfrm>
+          <a:prstGeom prst="rect">
+            <a:avLst/>
+          </a:prstGeom>
+        </p:spPr>
+      </p:pic>
+      <p:pic>
+        <p:nvPicPr>
+          <p:cNvPr id="8" name="Picture 7" descr="A graph with different colored lines&#10;&#10;AI-generated content may be incorrect.">
+            <a:extLst>
+              <a:ext uri="{FF2B5EF4-FFF2-40B4-BE49-F238E27FC236}">
+                <a16:creationId xmlns:a16="http://schemas.microsoft.com/office/drawing/2014/main" id="{62E3C5C3-5361-4244-34AE-1EB682E3DEA0}"/>
+              </a:ext>
+            </a:extLst>
+          </p:cNvPr>
+          <p:cNvPicPr>
+            <a:picLocks noChangeAspect="1"/>
+          </p:cNvPicPr>
+          <p:nvPr/>
+        </p:nvPicPr>
+        <p:blipFill>
+          <a:blip r:embed="rId4">
+            <a:extLst>
+              <a:ext uri="{28A0092B-C50C-407E-A947-70E740481C1C}">
+                <a14:useLocalDpi xmlns:a14="http://schemas.microsoft.com/office/drawing/2010/main" val="0"/>
+              </a:ext>
+            </a:extLst>
+          </a:blip>
+          <a:stretch>
+            <a:fillRect/>
+          </a:stretch>
+        </p:blipFill>
+        <p:spPr>
+          <a:xfrm>
+            <a:off x="4686300" y="190500"/>
+            <a:ext cx="3419475" cy="2992041"/>
+          </a:xfrm>
+          <a:prstGeom prst="rect">
+            <a:avLst/>
+          </a:prstGeom>
+        </p:spPr>
+      </p:pic>
+      <p:pic>
+        <p:nvPicPr>
+          <p:cNvPr id="11" name="Picture 10" descr="A graph of different colored lines&#10;&#10;AI-generated content may be incorrect.">
+            <a:extLst>
+              <a:ext uri="{FF2B5EF4-FFF2-40B4-BE49-F238E27FC236}">
+                <a16:creationId xmlns:a16="http://schemas.microsoft.com/office/drawing/2014/main" id="{463C1690-8E99-65E0-D8E5-BB792B8A6812}"/>
+              </a:ext>
+            </a:extLst>
+          </p:cNvPr>
+          <p:cNvPicPr>
+            <a:picLocks noChangeAspect="1"/>
+          </p:cNvPicPr>
+          <p:nvPr/>
+        </p:nvPicPr>
+        <p:blipFill>
+          <a:blip r:embed="rId5">
+            <a:extLst>
+              <a:ext uri="{28A0092B-C50C-407E-A947-70E740481C1C}">
+                <a14:useLocalDpi xmlns:a14="http://schemas.microsoft.com/office/drawing/2010/main" val="0"/>
+              </a:ext>
+            </a:extLst>
+          </a:blip>
+          <a:stretch>
+            <a:fillRect/>
+          </a:stretch>
+        </p:blipFill>
+        <p:spPr>
+          <a:xfrm>
+            <a:off x="4686300" y="3340826"/>
+            <a:ext cx="3547382" cy="3103959"/>
+          </a:xfrm>
+          <a:prstGeom prst="rect">
+            <a:avLst/>
+          </a:prstGeom>
+        </p:spPr>
+      </p:pic>
+      <p:pic>
+        <p:nvPicPr>
+          <p:cNvPr id="13" name="Picture 12" descr="A graph of numbers and lines&#10;&#10;AI-generated content may be incorrect.">
+            <a:extLst>
+              <a:ext uri="{FF2B5EF4-FFF2-40B4-BE49-F238E27FC236}">
+                <a16:creationId xmlns:a16="http://schemas.microsoft.com/office/drawing/2014/main" id="{70652DB1-679A-E1D3-2094-7F58B1737D46}"/>
+              </a:ext>
+            </a:extLst>
+          </p:cNvPr>
+          <p:cNvPicPr>
+            <a:picLocks noChangeAspect="1"/>
+          </p:cNvPicPr>
+          <p:nvPr/>
+        </p:nvPicPr>
+        <p:blipFill>
+          <a:blip r:embed="rId6">
+            <a:extLst>
+              <a:ext uri="{28A0092B-C50C-407E-A947-70E740481C1C}">
+                <a14:useLocalDpi xmlns:a14="http://schemas.microsoft.com/office/drawing/2010/main" val="0"/>
+              </a:ext>
+            </a:extLst>
+          </a:blip>
+          <a:stretch>
+            <a:fillRect/>
+          </a:stretch>
+        </p:blipFill>
+        <p:spPr>
+          <a:xfrm>
+            <a:off x="8233682" y="1515666"/>
+            <a:ext cx="3810000" cy="3333750"/>
+          </a:xfrm>
+          <a:prstGeom prst="rect">
+            <a:avLst/>
+          </a:prstGeom>
+        </p:spPr>
+      </p:pic>
+    </p:spTree>
+    <p:extLst>
+      <p:ext uri="{BB962C8B-B14F-4D97-AF65-F5344CB8AC3E}">
+        <p14:creationId xmlns:p14="http://schemas.microsoft.com/office/powerpoint/2010/main" val="3704894574"/>
+      </p:ext>
+    </p:extLst>
+  </p:cSld>
+  <p:clrMapOvr>
+    <a:masterClrMapping/>
+  </p:clrMapOvr>
+</p:sld>
+</file>
+
+<file path=ppt/slides/slide6.xml><?xml version="1.0" encoding="utf-8"?>
+<p:sld xmlns:a="http://schemas.openxmlformats.org/drawingml/2006/main" xmlns:r="http://schemas.openxmlformats.org/officeDocument/2006/relationships" xmlns:p="http://schemas.openxmlformats.org/presentationml/2006/main">
+  <p:cSld>
+    <p:spTree>
+      <p:nvGrpSpPr>
+        <p:cNvPr id="1" name="">
+          <a:extLst>
+            <a:ext uri="{FF2B5EF4-FFF2-40B4-BE49-F238E27FC236}">
+              <a16:creationId xmlns:a16="http://schemas.microsoft.com/office/drawing/2014/main" id="{BC050B57-9DF8-0A9D-D034-BBE43931ACB2}"/>
+            </a:ext>
+          </a:extLst>
+        </p:cNvPr>
+        <p:cNvGrpSpPr/>
+        <p:nvPr/>
+      </p:nvGrpSpPr>
+      <p:grpSpPr>
+        <a:xfrm>
+          <a:off x="0" y="0"/>
+          <a:ext cx="0" cy="0"/>
+          <a:chOff x="0" y="0"/>
+          <a:chExt cx="0" cy="0"/>
+        </a:xfrm>
+      </p:grpSpPr>
+      <p:pic>
+        <p:nvPicPr>
+          <p:cNvPr id="7" name="Picture 6" descr="A graph of a signal&#10;&#10;AI-generated content may be incorrect.">
+            <a:extLst>
+              <a:ext uri="{FF2B5EF4-FFF2-40B4-BE49-F238E27FC236}">
+                <a16:creationId xmlns:a16="http://schemas.microsoft.com/office/drawing/2014/main" id="{093EBB51-3C74-047F-8976-BB3A5F758D74}"/>
+              </a:ext>
+            </a:extLst>
+          </p:cNvPr>
+          <p:cNvPicPr>
+            <a:picLocks noChangeAspect="1"/>
+          </p:cNvPicPr>
+          <p:nvPr/>
+        </p:nvPicPr>
+        <p:blipFill>
+          <a:blip r:embed="rId2">
+            <a:extLst>
+              <a:ext uri="{28A0092B-C50C-407E-A947-70E740481C1C}">
+                <a14:useLocalDpi xmlns:a14="http://schemas.microsoft.com/office/drawing/2010/main" val="0"/>
+              </a:ext>
+            </a:extLst>
+          </a:blip>
+          <a:stretch>
+            <a:fillRect/>
+          </a:stretch>
+        </p:blipFill>
+        <p:spPr>
+          <a:xfrm>
+            <a:off x="178824" y="88174"/>
+            <a:ext cx="4454434" cy="3340826"/>
+          </a:xfrm>
+          <a:prstGeom prst="rect">
+            <a:avLst/>
+          </a:prstGeom>
+        </p:spPr>
+      </p:pic>
+      <p:pic>
+        <p:nvPicPr>
+          <p:cNvPr id="9" name="Picture 8" descr="A graph of a signal&#10;&#10;AI-generated content may be incorrect.">
+            <a:extLst>
+              <a:ext uri="{FF2B5EF4-FFF2-40B4-BE49-F238E27FC236}">
+                <a16:creationId xmlns:a16="http://schemas.microsoft.com/office/drawing/2014/main" id="{99B3E767-A8CD-A6C2-07D8-676E8A540DE2}"/>
+              </a:ext>
+            </a:extLst>
+          </p:cNvPr>
+          <p:cNvPicPr>
+            <a:picLocks noChangeAspect="1"/>
+          </p:cNvPicPr>
+          <p:nvPr/>
+        </p:nvPicPr>
+        <p:blipFill>
+          <a:blip r:embed="rId3">
+            <a:extLst>
+              <a:ext uri="{28A0092B-C50C-407E-A947-70E740481C1C}">
+                <a14:useLocalDpi xmlns:a14="http://schemas.microsoft.com/office/drawing/2010/main" val="0"/>
+              </a:ext>
+            </a:extLst>
+          </a:blip>
+          <a:stretch>
+            <a:fillRect/>
+          </a:stretch>
+        </p:blipFill>
+        <p:spPr>
+          <a:xfrm>
+            <a:off x="178824" y="3429000"/>
+            <a:ext cx="4454434" cy="3340826"/>
+          </a:xfrm>
+          <a:prstGeom prst="rect">
+            <a:avLst/>
+          </a:prstGeom>
+        </p:spPr>
+      </p:pic>
+      <p:pic>
+        <p:nvPicPr>
+          <p:cNvPr id="4" name="Picture 3" descr="A graph with different colored lines&#10;&#10;AI-generated content may be incorrect.">
+            <a:extLst>
+              <a:ext uri="{FF2B5EF4-FFF2-40B4-BE49-F238E27FC236}">
+                <a16:creationId xmlns:a16="http://schemas.microsoft.com/office/drawing/2014/main" id="{5D943BE2-0929-4D61-F910-236D34C61E62}"/>
+              </a:ext>
+            </a:extLst>
+          </p:cNvPr>
+          <p:cNvPicPr>
+            <a:picLocks noChangeAspect="1"/>
+          </p:cNvPicPr>
+          <p:nvPr/>
+        </p:nvPicPr>
+        <p:blipFill>
+          <a:blip r:embed="rId4">
+            <a:extLst>
+              <a:ext uri="{28A0092B-C50C-407E-A947-70E740481C1C}">
+                <a14:useLocalDpi xmlns:a14="http://schemas.microsoft.com/office/drawing/2010/main" val="0"/>
+              </a:ext>
+            </a:extLst>
+          </a:blip>
+          <a:stretch>
+            <a:fillRect/>
+          </a:stretch>
+        </p:blipFill>
+        <p:spPr>
+          <a:xfrm>
+            <a:off x="4633258" y="154849"/>
+            <a:ext cx="3482042" cy="3046787"/>
+          </a:xfrm>
+          <a:prstGeom prst="rect">
+            <a:avLst/>
+          </a:prstGeom>
+        </p:spPr>
+      </p:pic>
+      <p:pic>
+        <p:nvPicPr>
+          <p:cNvPr id="8" name="Picture 7" descr="A graph of different colored lines&#10;&#10;AI-generated content may be incorrect.">
+            <a:extLst>
+              <a:ext uri="{FF2B5EF4-FFF2-40B4-BE49-F238E27FC236}">
+                <a16:creationId xmlns:a16="http://schemas.microsoft.com/office/drawing/2014/main" id="{07358CDA-B406-7968-81F7-F884FC31194C}"/>
+              </a:ext>
+            </a:extLst>
+          </p:cNvPr>
+          <p:cNvPicPr>
+            <a:picLocks noChangeAspect="1"/>
+          </p:cNvPicPr>
+          <p:nvPr/>
+        </p:nvPicPr>
+        <p:blipFill>
+          <a:blip r:embed="rId5">
+            <a:extLst>
+              <a:ext uri="{28A0092B-C50C-407E-A947-70E740481C1C}">
+                <a14:useLocalDpi xmlns:a14="http://schemas.microsoft.com/office/drawing/2010/main" val="0"/>
+              </a:ext>
+            </a:extLst>
+          </a:blip>
+          <a:stretch>
+            <a:fillRect/>
+          </a:stretch>
+        </p:blipFill>
+        <p:spPr>
+          <a:xfrm>
+            <a:off x="4633258" y="3381398"/>
+            <a:ext cx="3612644" cy="3161064"/>
+          </a:xfrm>
+          <a:prstGeom prst="rect">
+            <a:avLst/>
+          </a:prstGeom>
+        </p:spPr>
+      </p:pic>
+      <p:pic>
+        <p:nvPicPr>
+          <p:cNvPr id="13" name="Picture 12" descr="A graph of numbers and lines&#10;&#10;AI-generated content may be incorrect.">
+            <a:extLst>
+              <a:ext uri="{FF2B5EF4-FFF2-40B4-BE49-F238E27FC236}">
+                <a16:creationId xmlns:a16="http://schemas.microsoft.com/office/drawing/2014/main" id="{3058D5E9-8385-C4D9-7CBE-D841B09E8088}"/>
+              </a:ext>
+            </a:extLst>
+          </p:cNvPr>
+          <p:cNvPicPr>
+            <a:picLocks noChangeAspect="1"/>
+          </p:cNvPicPr>
+          <p:nvPr/>
+        </p:nvPicPr>
+        <p:blipFill>
+          <a:blip r:embed="rId6">
+            <a:extLst>
+              <a:ext uri="{28A0092B-C50C-407E-A947-70E740481C1C}">
+                <a14:useLocalDpi xmlns:a14="http://schemas.microsoft.com/office/drawing/2010/main" val="0"/>
+              </a:ext>
+            </a:extLst>
+          </a:blip>
+          <a:stretch>
+            <a:fillRect/>
+          </a:stretch>
+        </p:blipFill>
+        <p:spPr>
+          <a:xfrm>
+            <a:off x="8198355" y="1467491"/>
+            <a:ext cx="3993645" cy="3494439"/>
+          </a:xfrm>
+          <a:prstGeom prst="rect">
+            <a:avLst/>
+          </a:prstGeom>
+        </p:spPr>
+      </p:pic>
+    </p:spTree>
+    <p:extLst>
+      <p:ext uri="{BB962C8B-B14F-4D97-AF65-F5344CB8AC3E}">
+        <p14:creationId xmlns:p14="http://schemas.microsoft.com/office/powerpoint/2010/main" val="925765398"/>
+      </p:ext>
+    </p:extLst>
+  </p:cSld>
+  <p:clrMapOvr>
+    <a:masterClrMapping/>
+  </p:clrMapOvr>
+</p:sld>
+</file>
+
 <file path=ppt/theme/theme1.xml><?xml version="1.0" encoding="utf-8"?>
 <a:theme xmlns:a="http://schemas.openxmlformats.org/drawingml/2006/main" name="Office Theme">
   <a:themeElements>

--- a/codes/data/2025/May_12/arranging_datas_with_init_time/statistics_with_powers.pptx
+++ b/codes/data/2025/May_12/arranging_datas_with_init_time/statistics_with_powers.pptx
@@ -316,7 +316,7 @@
           <a:p>
             <a:fld id="{F2893589-6773-40FD-BFE1-FA9DA81A7689}" type="datetimeFigureOut">
               <a:rPr lang="en-IN" smtClean="0"/>
-              <a:t>28-07-2025</a:t>
+              <a:t>05-08-2025</a:t>
             </a:fld>
             <a:endParaRPr lang="en-IN"/>
           </a:p>
@@ -516,7 +516,7 @@
           <a:p>
             <a:fld id="{F2893589-6773-40FD-BFE1-FA9DA81A7689}" type="datetimeFigureOut">
               <a:rPr lang="en-IN" smtClean="0"/>
-              <a:t>28-07-2025</a:t>
+              <a:t>05-08-2025</a:t>
             </a:fld>
             <a:endParaRPr lang="en-IN"/>
           </a:p>
@@ -726,7 +726,7 @@
           <a:p>
             <a:fld id="{F2893589-6773-40FD-BFE1-FA9DA81A7689}" type="datetimeFigureOut">
               <a:rPr lang="en-IN" smtClean="0"/>
-              <a:t>28-07-2025</a:t>
+              <a:t>05-08-2025</a:t>
             </a:fld>
             <a:endParaRPr lang="en-IN"/>
           </a:p>
@@ -926,7 +926,7 @@
           <a:p>
             <a:fld id="{F2893589-6773-40FD-BFE1-FA9DA81A7689}" type="datetimeFigureOut">
               <a:rPr lang="en-IN" smtClean="0"/>
-              <a:t>28-07-2025</a:t>
+              <a:t>05-08-2025</a:t>
             </a:fld>
             <a:endParaRPr lang="en-IN"/>
           </a:p>
@@ -1202,7 +1202,7 @@
           <a:p>
             <a:fld id="{F2893589-6773-40FD-BFE1-FA9DA81A7689}" type="datetimeFigureOut">
               <a:rPr lang="en-IN" smtClean="0"/>
-              <a:t>28-07-2025</a:t>
+              <a:t>05-08-2025</a:t>
             </a:fld>
             <a:endParaRPr lang="en-IN"/>
           </a:p>
@@ -1470,7 +1470,7 @@
           <a:p>
             <a:fld id="{F2893589-6773-40FD-BFE1-FA9DA81A7689}" type="datetimeFigureOut">
               <a:rPr lang="en-IN" smtClean="0"/>
-              <a:t>28-07-2025</a:t>
+              <a:t>05-08-2025</a:t>
             </a:fld>
             <a:endParaRPr lang="en-IN"/>
           </a:p>
@@ -1885,7 +1885,7 @@
           <a:p>
             <a:fld id="{F2893589-6773-40FD-BFE1-FA9DA81A7689}" type="datetimeFigureOut">
               <a:rPr lang="en-IN" smtClean="0"/>
-              <a:t>28-07-2025</a:t>
+              <a:t>05-08-2025</a:t>
             </a:fld>
             <a:endParaRPr lang="en-IN"/>
           </a:p>
@@ -2027,7 +2027,7 @@
           <a:p>
             <a:fld id="{F2893589-6773-40FD-BFE1-FA9DA81A7689}" type="datetimeFigureOut">
               <a:rPr lang="en-IN" smtClean="0"/>
-              <a:t>28-07-2025</a:t>
+              <a:t>05-08-2025</a:t>
             </a:fld>
             <a:endParaRPr lang="en-IN"/>
           </a:p>
@@ -2140,7 +2140,7 @@
           <a:p>
             <a:fld id="{F2893589-6773-40FD-BFE1-FA9DA81A7689}" type="datetimeFigureOut">
               <a:rPr lang="en-IN" smtClean="0"/>
-              <a:t>28-07-2025</a:t>
+              <a:t>05-08-2025</a:t>
             </a:fld>
             <a:endParaRPr lang="en-IN"/>
           </a:p>
@@ -2453,7 +2453,7 @@
           <a:p>
             <a:fld id="{F2893589-6773-40FD-BFE1-FA9DA81A7689}" type="datetimeFigureOut">
               <a:rPr lang="en-IN" smtClean="0"/>
-              <a:t>28-07-2025</a:t>
+              <a:t>05-08-2025</a:t>
             </a:fld>
             <a:endParaRPr lang="en-IN"/>
           </a:p>
@@ -2742,7 +2742,7 @@
           <a:p>
             <a:fld id="{F2893589-6773-40FD-BFE1-FA9DA81A7689}" type="datetimeFigureOut">
               <a:rPr lang="en-IN" smtClean="0"/>
-              <a:t>28-07-2025</a:t>
+              <a:t>05-08-2025</a:t>
             </a:fld>
             <a:endParaRPr lang="en-IN"/>
           </a:p>
@@ -2985,7 +2985,7 @@
           <a:p>
             <a:fld id="{F2893589-6773-40FD-BFE1-FA9DA81A7689}" type="datetimeFigureOut">
               <a:rPr lang="en-IN" smtClean="0"/>
-              <a:t>28-07-2025</a:t>
+              <a:t>05-08-2025</a:t>
             </a:fld>
             <a:endParaRPr lang="en-IN"/>
           </a:p>
